--- a/Foundation_F6/Workshop/F6-W03_Apply_Workshop_L05-L06_Market_or_Shopping_Centre.pptx
+++ b/Foundation_F6/Workshop/F6-W03_Apply_Workshop_L05-L06_Market_or_Shopping_Centre.pptx
@@ -7436,7 +7436,7 @@
                 <a:latin typeface="Calibri" pitchFamily="34" charset="0"/>
                 <a:cs typeface="Amiri" pitchFamily="2" charset="-78"/>
               </a:rPr>
-              <a:t>Odd numbers come from F6-L05, even numbers from F6-L06. Core: a full sentence from the starter. Develop: add the “more” part. Stretch: link two answers with </a:t>
+              <a:t>Odd numbers come from F6-L05, even numbers from F6-L06. Core: a full sentence from the starter. Develop: add the “more” part. Stretch: link two answers with ‏</a:t>
             </a:r>
             <a:pPr algn="l" indent="0" marL="0">
               <a:buNone/>
@@ -7463,7 +7463,7 @@
                 <a:latin typeface="Calibri" pitchFamily="34" charset="0"/>
                 <a:cs typeface="Amiri" pitchFamily="2" charset="-78"/>
               </a:rPr>
-              <a:t>, </a:t>
+              <a:t>‏, ‏</a:t>
             </a:r>
             <a:pPr algn="l" indent="0" marL="0">
               <a:buNone/>
@@ -7490,7 +7490,7 @@
                 <a:latin typeface="Calibri" pitchFamily="34" charset="0"/>
                 <a:cs typeface="Amiri" pitchFamily="2" charset="-78"/>
               </a:rPr>
-              <a:t> or </a:t>
+              <a:t>‏ or ‏</a:t>
             </a:r>
             <a:pPr algn="l" indent="0" marL="0">
               <a:buNone/>
@@ -7517,7 +7517,7 @@
                 <a:latin typeface="Calibri" pitchFamily="34" charset="0"/>
                 <a:cs typeface="Amiri" pitchFamily="2" charset="-78"/>
               </a:rPr>
-              <a:t>. Swap after each question.</a:t>
+              <a:t>‏. Swap after each question.</a:t>
             </a:r>
             <a:endParaRPr lang="en-US" sz="1100" dirty="0"/>
           </a:p>
@@ -10840,7 +10840,7 @@
                 <a:latin typeface="Calibri" pitchFamily="34" charset="0"/>
                 <a:cs typeface="Amiri" pitchFamily="2" charset="-78"/>
               </a:rPr>
-              <a:t>Compare: … </a:t>
+              <a:t>Compare: … ‏</a:t>
             </a:r>
             <a:pPr algn="l" indent="0" marL="0">
               <a:buNone/>
@@ -10894,7 +10894,7 @@
                 <a:latin typeface="Calibri" pitchFamily="34" charset="0"/>
                 <a:cs typeface="Amiri" pitchFamily="2" charset="-78"/>
               </a:rPr>
-              <a:t> …</a:t>
+              <a:t> …‏</a:t>
             </a:r>
             <a:endParaRPr lang="en-US" sz="1150" dirty="0"/>
           </a:p>
@@ -11031,7 +11031,7 @@
                 <a:latin typeface="Calibri" pitchFamily="34" charset="0"/>
                 <a:cs typeface="Amiri" pitchFamily="2" charset="-78"/>
               </a:rPr>
-              <a:t>Add </a:t>
+              <a:t>Add ‏</a:t>
             </a:r>
             <a:pPr algn="l" indent="0" marL="0">
               <a:buNone/>
@@ -11085,7 +11085,7 @@
                 <a:latin typeface="Calibri" pitchFamily="34" charset="0"/>
                 <a:cs typeface="Amiri" pitchFamily="2" charset="-78"/>
               </a:rPr>
-              <a:t> … and </a:t>
+              <a:t> …‏ and ‏</a:t>
             </a:r>
             <a:pPr algn="l" indent="0" marL="0">
               <a:buNone/>
@@ -11112,7 +11112,7 @@
                 <a:latin typeface="Calibri" pitchFamily="34" charset="0"/>
                 <a:cs typeface="Amiri" pitchFamily="2" charset="-78"/>
               </a:rPr>
-              <a:t> …</a:t>
+              <a:t> …‏</a:t>
             </a:r>
             <a:endParaRPr lang="en-US" sz="1150" dirty="0"/>
           </a:p>
@@ -17502,7 +17502,7 @@
                 <a:latin typeface="Calibri" pitchFamily="34" charset="0"/>
                 <a:cs typeface="Amiri" pitchFamily="2" charset="-78"/>
               </a:rPr>
-              <a:t>Feminine → </a:t>
+              <a:t>Feminine → ‏</a:t>
             </a:r>
             <a:pPr algn="l" indent="0" marL="0">
               <a:buNone/>
@@ -17529,7 +17529,7 @@
                 <a:latin typeface="Calibri" pitchFamily="34" charset="0"/>
                 <a:cs typeface="Amiri" pitchFamily="2" charset="-78"/>
               </a:rPr>
-              <a:t> on both adjectives.</a:t>
+              <a:t>‏ on both adjectives.</a:t>
             </a:r>
             <a:endParaRPr lang="en-US" sz="1150" dirty="0"/>
           </a:p>
@@ -17740,7 +17740,7 @@
                 <a:latin typeface="Calibri" pitchFamily="34" charset="0"/>
                 <a:cs typeface="Amiri" pitchFamily="2" charset="-78"/>
               </a:rPr>
-              <a:t>Feminine item → </a:t>
+              <a:t>Feminine item → ‏</a:t>
             </a:r>
             <a:pPr algn="l" indent="0" marL="0">
               <a:buNone/>
@@ -17767,7 +17767,7 @@
                 <a:latin typeface="Calibri" pitchFamily="34" charset="0"/>
                 <a:cs typeface="Amiri" pitchFamily="2" charset="-78"/>
               </a:rPr>
-              <a:t>.</a:t>
+              <a:t>‏.</a:t>
             </a:r>
             <a:endParaRPr lang="en-US" sz="1150" dirty="0"/>
           </a:p>
@@ -17971,6 +17971,19 @@
               <a:buNone/>
             </a:pPr>
             <a:r>
+              <a:rPr lang="en-US" sz="1150" b="1" dirty="0">
+                <a:solidFill>
+                  <a:srgbClr val="1B3B6F"/>
+                </a:solidFill>
+                <a:latin typeface="Calibri" pitchFamily="34" charset="0"/>
+                <a:cs typeface="Amiri" pitchFamily="2" charset="-78"/>
+              </a:rPr>
+              <a:t>‏</a:t>
+            </a:r>
+            <a:pPr algn="l" indent="0" marL="0">
+              <a:buNone/>
+            </a:pPr>
+            <a:r>
               <a:rPr lang="ar-SA" altLang="en-US" sz="1500" b="1" dirty="0">
                 <a:solidFill>
                   <a:srgbClr val="1B3B6F"/>
@@ -17992,7 +18005,7 @@
                 <a:latin typeface="Calibri" pitchFamily="34" charset="0"/>
                 <a:cs typeface="Amiri" pitchFamily="2" charset="-78"/>
               </a:rPr>
-              <a:t> + noun in the accusative (-a / -i for plural).</a:t>
+              <a:t>‏ + noun in the accusative (-a / -i for plural).</a:t>
             </a:r>
             <a:endParaRPr lang="en-US" sz="1150" dirty="0"/>
           </a:p>
@@ -20192,7 +20205,7 @@
                 <a:latin typeface="Calibri" pitchFamily="34" charset="0"/>
                 <a:cs typeface="Amiri" pitchFamily="2" charset="-78"/>
               </a:rPr>
-              <a:t>☐  At least one </a:t>
+              <a:t>☐  At least one ‏</a:t>
             </a:r>
             <a:pPr algn="l" indent="0" marL="0">
               <a:buNone/>
@@ -20219,7 +20232,7 @@
                 <a:latin typeface="Calibri" pitchFamily="34" charset="0"/>
                 <a:cs typeface="Amiri" pitchFamily="2" charset="-78"/>
               </a:rPr>
-              <a:t> and one </a:t>
+              <a:t>‏ and one ‏</a:t>
             </a:r>
             <a:pPr algn="l" indent="0" marL="0">
               <a:buNone/>
@@ -20246,7 +20259,7 @@
                 <a:latin typeface="Calibri" pitchFamily="34" charset="0"/>
                 <a:cs typeface="Amiri" pitchFamily="2" charset="-78"/>
               </a:rPr>
-              <a:t> (Develop).</a:t>
+              <a:t>‏ (Develop).</a:t>
             </a:r>
             <a:endParaRPr lang="en-US" sz="1200" dirty="0"/>
           </a:p>
@@ -23794,7 +23807,7 @@
                 <a:latin typeface="Calibri" pitchFamily="34" charset="0"/>
                 <a:cs typeface="Amiri" pitchFamily="2" charset="-78"/>
               </a:rPr>
-              <a:t>compare with </a:t>
+              <a:t>compare with ‏</a:t>
             </a:r>
             <a:pPr algn="l" indent="0" marL="0">
               <a:buNone/>
@@ -23821,7 +23834,7 @@
                 <a:latin typeface="Calibri" pitchFamily="34" charset="0"/>
                 <a:cs typeface="Amiri" pitchFamily="2" charset="-78"/>
               </a:rPr>
-              <a:t> and get the number + </a:t>
+              <a:t>‏ and get the number + ‏</a:t>
             </a:r>
             <a:pPr algn="l" indent="0" marL="0">
               <a:buNone/>
@@ -23848,7 +23861,7 @@
                 <a:latin typeface="Calibri" pitchFamily="34" charset="0"/>
                 <a:cs typeface="Amiri" pitchFamily="2" charset="-78"/>
               </a:rPr>
-              <a:t> right?</a:t>
+              <a:t>‏ right?</a:t>
             </a:r>
             <a:endParaRPr lang="en-US" sz="1100" dirty="0"/>
           </a:p>
@@ -24007,7 +24020,7 @@
                 <a:latin typeface="Calibri" pitchFamily="34" charset="0"/>
                 <a:cs typeface="Amiri" pitchFamily="2" charset="-78"/>
               </a:rPr>
-              <a:t>use linking words (</a:t>
+              <a:t>use linking words (‏</a:t>
             </a:r>
             <a:pPr algn="l" indent="0" marL="0">
               <a:buNone/>
@@ -24115,7 +24128,7 @@
                 <a:latin typeface="Calibri" pitchFamily="34" charset="0"/>
                 <a:cs typeface="Amiri" pitchFamily="2" charset="-78"/>
               </a:rPr>
-              <a:t>)?</a:t>
+              <a:t>‏)?</a:t>
             </a:r>
             <a:endParaRPr lang="en-US" sz="1100" dirty="0"/>
           </a:p>
@@ -28061,7 +28074,7 @@
                 <a:latin typeface="Calibri" pitchFamily="34" charset="0"/>
                 <a:cs typeface="Amiri" pitchFamily="2" charset="-78"/>
               </a:rPr>
-              <a:t>I added reasons (</a:t>
+              <a:t>I added reasons (‏</a:t>
             </a:r>
             <a:pPr algn="l" indent="0" marL="0">
               <a:buNone/>
@@ -28088,7 +28101,7 @@
                 <a:latin typeface="Calibri" pitchFamily="34" charset="0"/>
                 <a:cs typeface="Amiri" pitchFamily="2" charset="-78"/>
               </a:rPr>
-              <a:t>) and extra details without frames.</a:t>
+              <a:t>‏) and extra details without frames.</a:t>
             </a:r>
             <a:endParaRPr lang="en-US" sz="1300" dirty="0"/>
           </a:p>
@@ -32216,7 +32229,7 @@
                 <a:latin typeface="Calibri" pitchFamily="34" charset="0"/>
                 <a:cs typeface="Amiri" pitchFamily="2" charset="-78"/>
               </a:rPr>
-              <a:t>☐  Add a reason (</a:t>
+              <a:t>☐  Add a reason (‏</a:t>
             </a:r>
             <a:pPr algn="l" indent="0" marL="0">
               <a:buNone/>
@@ -32243,7 +32256,7 @@
                 <a:latin typeface="Calibri" pitchFamily="34" charset="0"/>
                 <a:cs typeface="Amiri" pitchFamily="2" charset="-78"/>
               </a:rPr>
-              <a:t>) and an extra detail to every point.</a:t>
+              <a:t>‏) and an extra detail to every point.</a:t>
             </a:r>
             <a:endParaRPr lang="en-US" sz="1300" dirty="0"/>
           </a:p>
@@ -33764,7 +33777,7 @@
                 <a:latin typeface="Calibri" pitchFamily="34" charset="0"/>
                 <a:cs typeface="Amiri" pitchFamily="2" charset="-78"/>
               </a:rPr>
-              <a:t>Join a word from each lesson in one sentence with </a:t>
+              <a:t>Join a word from each lesson in one sentence with ‏</a:t>
             </a:r>
             <a:pPr algn="l" indent="0" marL="0">
               <a:buNone/>
@@ -33791,7 +33804,7 @@
                 <a:latin typeface="Calibri" pitchFamily="34" charset="0"/>
                 <a:cs typeface="Amiri" pitchFamily="2" charset="-78"/>
               </a:rPr>
-              <a:t> or </a:t>
+              <a:t>‏ or ‏</a:t>
             </a:r>
             <a:pPr algn="l" indent="0" marL="0">
               <a:buNone/>
@@ -33818,7 +33831,7 @@
                 <a:latin typeface="Calibri" pitchFamily="34" charset="0"/>
                 <a:cs typeface="Amiri" pitchFamily="2" charset="-78"/>
               </a:rPr>
-              <a:t>.</a:t>
+              <a:t>‏.</a:t>
             </a:r>
             <a:endParaRPr lang="en-US" sz="1150" dirty="0"/>
           </a:p>
